--- a/hs-web/W07_CSS3_기본_속성_활용하기.pptx
+++ b/hs-web/W07_CSS3_기본_속성_활용하기.pptx
@@ -21006,366 +21006,30 @@
           </a:p>
         </p:txBody>
       </p:sp>
-      <p:sp>
-        <p:nvSpPr>
-          <p:cNvPr id="11" name="deckgen:code"/>
-          <p:cNvSpPr txBox="1"/>
-          <p:nvPr/>
-        </p:nvSpPr>
+      <p:pic>
+        <p:nvPicPr>
+          <p:cNvPr id="11" name="deckgen:code-art" descr="image.png"/>
+          <p:cNvPicPr>
+            <a:picLocks noChangeAspect="1"/>
+          </p:cNvPicPr>
+          <p:nvPr/>
+        </p:nvPicPr>
+        <p:blipFill>
+          <a:blip r:embed="rId2"/>
+          <a:stretch>
+            <a:fillRect/>
+          </a:stretch>
+        </p:blipFill>
         <p:spPr>
           <a:xfrm>
             <a:off x="2038350" y="2552700"/>
-            <a:ext cx="14897100" cy="4724400"/>
-          </a:xfrm>
-          <a:prstGeom prst="rect">
-            <a:avLst/>
-          </a:prstGeom>
-          <a:noFill/>
-        </p:spPr>
-        <p:txBody>
-          <a:bodyPr wrap="none" lIns="0" rIns="0" tIns="0" bIns="0" anchor="t">
-            <a:spAutoFit/>
-          </a:bodyPr>
-          <a:lstStyle/>
-          <a:p>
-            <a:pPr algn="l">
-              <a:lnSpc>
-                <a:spcPct val="115000"/>
-              </a:lnSpc>
-            </a:pPr>
-            <a:r>
-              <a:rPr sz="2175" b="0">
-                <a:solidFill>
-                  <a:srgbClr val="E6EAF2"/>
-                </a:solidFill>
-                <a:latin typeface="나눔고딕코딩"/>
-                <a:ea typeface="나눔고딕코딩"/>
-                <a:cs typeface="나눔고딕코딩"/>
-              </a:rPr>
-              <a:t>┌─────────────────────────────────────┐</a:t>
-            </a:r>
-          </a:p>
-          <a:p>
-            <a:pPr algn="l">
-              <a:lnSpc>
-                <a:spcPct val="115000"/>
-              </a:lnSpc>
-            </a:pPr>
-            <a:r>
-              <a:rPr sz="2175" b="0">
-                <a:solidFill>
-                  <a:srgbClr val="E6EAF2"/>
-                </a:solidFill>
-                <a:latin typeface="나눔고딕코딩"/>
-                <a:ea typeface="나눔고딕코딩"/>
-                <a:cs typeface="나눔고딕코딩"/>
-              </a:rPr>
-              <a:t>│           </a:t>
-            </a:r>
-            <a:r>
-              <a:rPr sz="2175" b="0">
-                <a:solidFill>
-                  <a:srgbClr val="E6EAF2"/>
-                </a:solidFill>
-                <a:latin typeface="나눔고딕코딩"/>
-                <a:ea typeface="나눔고딕코딩"/>
-                <a:cs typeface="나눔고딕코딩"/>
-              </a:rPr>
-              <a:t>margin</a:t>
-            </a:r>
-            <a:r>
-              <a:rPr sz="2175" b="0">
-                <a:solidFill>
-                  <a:srgbClr val="E6EAF2"/>
-                </a:solidFill>
-                <a:latin typeface="나눔고딕코딩"/>
-                <a:ea typeface="나눔고딕코딩"/>
-                <a:cs typeface="나눔고딕코딩"/>
-              </a:rPr>
-              <a:t> (바깥 여백)          │  ← 다른 요소와의 거리. 투명</a:t>
-            </a:r>
-          </a:p>
-          <a:p>
-            <a:pPr algn="l">
-              <a:lnSpc>
-                <a:spcPct val="115000"/>
-              </a:lnSpc>
-            </a:pPr>
-            <a:r>
-              <a:rPr sz="2175" b="0">
-                <a:solidFill>
-                  <a:srgbClr val="E6EAF2"/>
-                </a:solidFill>
-                <a:latin typeface="나눔고딕코딩"/>
-                <a:ea typeface="나눔고딕코딩"/>
-                <a:cs typeface="나눔고딕코딩"/>
-              </a:rPr>
-              <a:t>│  ┌───────────────────────────────┐  │</a:t>
-            </a:r>
-          </a:p>
-          <a:p>
-            <a:pPr algn="l">
-              <a:lnSpc>
-                <a:spcPct val="115000"/>
-              </a:lnSpc>
-            </a:pPr>
-            <a:r>
-              <a:rPr sz="2175" b="0">
-                <a:solidFill>
-                  <a:srgbClr val="E6EAF2"/>
-                </a:solidFill>
-                <a:latin typeface="나눔고딕코딩"/>
-                <a:ea typeface="나눔고딕코딩"/>
-                <a:cs typeface="나눔고딕코딩"/>
-              </a:rPr>
-              <a:t>│  │        </a:t>
-            </a:r>
-            <a:r>
-              <a:rPr sz="2175" b="0">
-                <a:solidFill>
-                  <a:srgbClr val="E6EAF2"/>
-                </a:solidFill>
-                <a:latin typeface="나눔고딕코딩"/>
-                <a:ea typeface="나눔고딕코딩"/>
-                <a:cs typeface="나눔고딕코딩"/>
-              </a:rPr>
-              <a:t>border</a:t>
-            </a:r>
-            <a:r>
-              <a:rPr sz="2175" b="0">
-                <a:solidFill>
-                  <a:srgbClr val="E6EAF2"/>
-                </a:solidFill>
-                <a:latin typeface="나눔고딕코딩"/>
-                <a:ea typeface="나눔고딕코딩"/>
-                <a:cs typeface="나눔고딕코딩"/>
-              </a:rPr>
-              <a:t> (테두리)          │  │  ← 선. 두께·모양·색</a:t>
-            </a:r>
-          </a:p>
-          <a:p>
-            <a:pPr algn="l">
-              <a:lnSpc>
-                <a:spcPct val="115000"/>
-              </a:lnSpc>
-            </a:pPr>
-            <a:r>
-              <a:rPr sz="2175" b="0">
-                <a:solidFill>
-                  <a:srgbClr val="E6EAF2"/>
-                </a:solidFill>
-                <a:latin typeface="나눔고딕코딩"/>
-                <a:ea typeface="나눔고딕코딩"/>
-                <a:cs typeface="나눔고딕코딩"/>
-              </a:rPr>
-              <a:t>│  │  ┌─────────────────────────┐  │  │</a:t>
-            </a:r>
-          </a:p>
-          <a:p>
-            <a:pPr algn="l">
-              <a:lnSpc>
-                <a:spcPct val="115000"/>
-              </a:lnSpc>
-            </a:pPr>
-            <a:r>
-              <a:rPr sz="2175" b="0">
-                <a:solidFill>
-                  <a:srgbClr val="E6EAF2"/>
-                </a:solidFill>
-                <a:latin typeface="나눔고딕코딩"/>
-                <a:ea typeface="나눔고딕코딩"/>
-                <a:cs typeface="나눔고딕코딩"/>
-              </a:rPr>
-              <a:t>│  │  │    </a:t>
-            </a:r>
-            <a:r>
-              <a:rPr sz="2175" b="0">
-                <a:solidFill>
-                  <a:srgbClr val="E6EAF2"/>
-                </a:solidFill>
-                <a:latin typeface="나눔고딕코딩"/>
-                <a:ea typeface="나눔고딕코딩"/>
-                <a:cs typeface="나눔고딕코딩"/>
-              </a:rPr>
-              <a:t>padding</a:t>
-            </a:r>
-            <a:r>
-              <a:rPr sz="2175" b="0">
-                <a:solidFill>
-                  <a:srgbClr val="E6EAF2"/>
-                </a:solidFill>
-                <a:latin typeface="나눔고딕코딩"/>
-                <a:ea typeface="나눔고딕코딩"/>
-                <a:cs typeface="나눔고딕코딩"/>
-              </a:rPr>
-              <a:t> (안쪽 여백)    │  │  │  ← 내용과 테두리 사이. 배경색이 칠해짐</a:t>
-            </a:r>
-          </a:p>
-          <a:p>
-            <a:pPr algn="l">
-              <a:lnSpc>
-                <a:spcPct val="115000"/>
-              </a:lnSpc>
-            </a:pPr>
-            <a:r>
-              <a:rPr sz="2175" b="0">
-                <a:solidFill>
-                  <a:srgbClr val="E6EAF2"/>
-                </a:solidFill>
-                <a:latin typeface="나눔고딕코딩"/>
-                <a:ea typeface="나눔고딕코딩"/>
-                <a:cs typeface="나눔고딕코딩"/>
-              </a:rPr>
-              <a:t>│  │  │  ┌───────────────────┐  │  │  │</a:t>
-            </a:r>
-          </a:p>
-          <a:p>
-            <a:pPr algn="l">
-              <a:lnSpc>
-                <a:spcPct val="115000"/>
-              </a:lnSpc>
-            </a:pPr>
-            <a:r>
-              <a:rPr sz="2175" b="0">
-                <a:solidFill>
-                  <a:srgbClr val="E6EAF2"/>
-                </a:solidFill>
-                <a:latin typeface="나눔고딕코딩"/>
-                <a:ea typeface="나눔고딕코딩"/>
-                <a:cs typeface="나눔고딕코딩"/>
-              </a:rPr>
-              <a:t>│  │  │  │   </a:t>
-            </a:r>
-            <a:r>
-              <a:rPr sz="2175" b="0">
-                <a:solidFill>
-                  <a:srgbClr val="E6EAF2"/>
-                </a:solidFill>
-                <a:latin typeface="나눔고딕코딩"/>
-                <a:ea typeface="나눔고딕코딩"/>
-                <a:cs typeface="나눔고딕코딩"/>
-              </a:rPr>
-              <a:t>content</a:t>
-            </a:r>
-            <a:r>
-              <a:rPr sz="2175" b="0">
-                <a:solidFill>
-                  <a:srgbClr val="E6EAF2"/>
-                </a:solidFill>
-                <a:latin typeface="나눔고딕코딩"/>
-                <a:ea typeface="나눔고딕코딩"/>
-                <a:cs typeface="나눔고딕코딩"/>
-              </a:rPr>
-              <a:t> (내용)   │  │  │  │  ← </a:t>
-            </a:r>
-            <a:r>
-              <a:rPr sz="2175" b="0">
-                <a:solidFill>
-                  <a:srgbClr val="E6EAF2"/>
-                </a:solidFill>
-                <a:latin typeface="나눔고딕코딩"/>
-                <a:ea typeface="나눔고딕코딩"/>
-                <a:cs typeface="나눔고딕코딩"/>
-              </a:rPr>
-              <a:t>width</a:t>
-            </a:r>
-            <a:r>
-              <a:rPr sz="2175" b="0">
-                <a:solidFill>
-                  <a:srgbClr val="E6EAF2"/>
-                </a:solidFill>
-                <a:latin typeface="나눔고딕코딩"/>
-                <a:ea typeface="나눔고딕코딩"/>
-                <a:cs typeface="나눔고딕코딩"/>
-              </a:rPr>
-              <a:t> × </a:t>
-            </a:r>
-            <a:r>
-              <a:rPr sz="2175" b="0">
-                <a:solidFill>
-                  <a:srgbClr val="E6EAF2"/>
-                </a:solidFill>
-                <a:latin typeface="나눔고딕코딩"/>
-                <a:ea typeface="나눔고딕코딩"/>
-                <a:cs typeface="나눔고딕코딩"/>
-              </a:rPr>
-              <a:t>height</a:t>
-            </a:r>
-          </a:p>
-          <a:p>
-            <a:pPr algn="l">
-              <a:lnSpc>
-                <a:spcPct val="115000"/>
-              </a:lnSpc>
-            </a:pPr>
-            <a:r>
-              <a:rPr sz="2175" b="0">
-                <a:solidFill>
-                  <a:srgbClr val="E6EAF2"/>
-                </a:solidFill>
-                <a:latin typeface="나눔고딕코딩"/>
-                <a:ea typeface="나눔고딕코딩"/>
-                <a:cs typeface="나눔고딕코딩"/>
-              </a:rPr>
-              <a:t>│  │  │  └───────────────────┘  │  │  │</a:t>
-            </a:r>
-          </a:p>
-          <a:p>
-            <a:pPr algn="l">
-              <a:lnSpc>
-                <a:spcPct val="115000"/>
-              </a:lnSpc>
-            </a:pPr>
-            <a:r>
-              <a:rPr sz="2175" b="0">
-                <a:solidFill>
-                  <a:srgbClr val="E6EAF2"/>
-                </a:solidFill>
-                <a:latin typeface="나눔고딕코딩"/>
-                <a:ea typeface="나눔고딕코딩"/>
-                <a:cs typeface="나눔고딕코딩"/>
-              </a:rPr>
-              <a:t>│  │  └─────────────────────────┘  │  │</a:t>
-            </a:r>
-          </a:p>
-          <a:p>
-            <a:pPr algn="l">
-              <a:lnSpc>
-                <a:spcPct val="115000"/>
-              </a:lnSpc>
-            </a:pPr>
-            <a:r>
-              <a:rPr sz="2175" b="0">
-                <a:solidFill>
-                  <a:srgbClr val="E6EAF2"/>
-                </a:solidFill>
-                <a:latin typeface="나눔고딕코딩"/>
-                <a:ea typeface="나눔고딕코딩"/>
-                <a:cs typeface="나눔고딕코딩"/>
-              </a:rPr>
-              <a:t>│  └───────────────────────────────┘  │</a:t>
-            </a:r>
-          </a:p>
-          <a:p>
-            <a:pPr algn="l">
-              <a:lnSpc>
-                <a:spcPct val="115000"/>
-              </a:lnSpc>
-            </a:pPr>
-            <a:r>
-              <a:rPr sz="2175" b="0">
-                <a:solidFill>
-                  <a:srgbClr val="E6EAF2"/>
-                </a:solidFill>
-                <a:latin typeface="나눔고딕코딩"/>
-                <a:ea typeface="나눔고딕코딩"/>
-                <a:cs typeface="나눔고딕코딩"/>
-              </a:rPr>
-              <a:t>└─────────────────────────────────────┘</a:t>
-            </a:r>
-          </a:p>
-        </p:txBody>
-      </p:sp>
+            <a:ext cx="9744075" cy="4581525"/>
+          </a:xfrm>
+          <a:prstGeom prst="rect">
+            <a:avLst/>
+          </a:prstGeom>
+        </p:spPr>
+      </p:pic>
       <p:sp>
         <p:nvSpPr>
           <p:cNvPr id="12" name="Rectangle 11"/>
